--- a/어라이즈 넥스트젠 2026.10 [1].pptx
+++ b/어라이즈 넥스트젠 2026.10 [1].pptx
@@ -5416,27 +5416,34 @@
               </a:defRPr>
             </a:pPr>
             <a:r>
-              <a:rPr sz="2000" i="1">
-                <a:solidFill>
-                  <a:srgbClr val="F6F5EF"/>
-                </a:solidFill>
-                <a:latin typeface="Noto Sans CJK KR"/>
-              </a:rPr>
-              <a:t>“내가 제일 중요하다”  |  “I must begin with myself.”</a:t>
-            </a:r>
-          </a:p>
-        </p:txBody>
-      </p:sp>
-      <p:sp>
-        <p:nvSpPr>
-          <p:cNvPr id="6" name="TextBox 5"/>
+              <a:rPr b="1" sz="1600">
+                <a:solidFill>
+                  <a:srgbClr val="122947"/>
+                </a:solidFill>
+              </a:rPr>
+              <a:t>“내 자신과 후대 모든 민족이”  |  </a:t>
+            </a:r>
+            <a:r>
+              <a:rPr b="1" sz="1600">
+                <a:solidFill>
+                  <a:srgbClr val="BF7314"/>
+                </a:solidFill>
+              </a:rPr>
+              <a:t>“For Myself, the Next Generation, and All Nations”</a:t>
+            </a:r>
+          </a:p>
+        </p:txBody>
+      </p:sp>
+      <p:sp>
+        <p:nvSpPr>
+          <p:cNvPr id="28" name="TextBox 27"/>
           <p:cNvSpPr txBox="1"/>
           <p:nvPr/>
         </p:nvSpPr>
         <p:spPr>
           <a:xfrm>
-            <a:off x="822960" y="2331720"/>
-            <a:ext cx="10607040" cy="677108"/>
+            <a:off x="777240" y="2011680"/>
+            <a:ext cx="10607040" cy="1920240"/>
           </a:xfrm>
           <a:prstGeom prst="rect">
             <a:avLst/>
@@ -5449,151 +5456,47 @@
           </a:bodyPr>
           <a:lstStyle/>
           <a:p>
-            <a:pPr>
-              <a:defRPr sz="1800" b="1">
-                <a:solidFill>
-                  <a:srgbClr val="F6F5EF"/>
-                </a:solidFill>
-                <a:latin typeface="Noto Sans CJK KR"/>
-              </a:defRPr>
-            </a:pPr>
-            <a:r>
-              <a:rPr dirty="0">
-                <a:solidFill>
-                  <a:srgbClr val="F6F5EF"/>
-                </a:solidFill>
-                <a:latin typeface="Noto Sans CJK KR"/>
-              </a:rPr>
-              <a:t>• </a:t>
-            </a:r>
-            <a:r>
-              <a:rPr lang="ko-KR" altLang="en-US" dirty="0">
-                <a:solidFill>
-                  <a:srgbClr val="F6F5EF"/>
-                </a:solidFill>
-                <a:latin typeface="Noto Sans CJK KR"/>
-              </a:rPr>
-              <a:t>나의</a:t>
-            </a:r>
-            <a:r>
-              <a:rPr dirty="0">
-                <a:solidFill>
-                  <a:srgbClr val="F6F5EF"/>
-                </a:solidFill>
-                <a:latin typeface="Noto Sans CJK KR"/>
-              </a:rPr>
-              <a:t> </a:t>
-            </a:r>
-            <a:r>
-              <a:rPr dirty="0" err="1">
-                <a:solidFill>
-                  <a:srgbClr val="F6F5EF"/>
-                </a:solidFill>
-                <a:latin typeface="Noto Sans CJK KR"/>
-              </a:rPr>
-              <a:t>복음이</a:t>
-            </a:r>
-            <a:r>
-              <a:rPr dirty="0">
-                <a:solidFill>
-                  <a:srgbClr val="F6F5EF"/>
-                </a:solidFill>
-                <a:latin typeface="Noto Sans CJK KR"/>
-              </a:rPr>
-              <a:t> </a:t>
-            </a:r>
-            <a:r>
-              <a:rPr dirty="0" err="1">
-                <a:solidFill>
-                  <a:srgbClr val="F6F5EF"/>
-                </a:solidFill>
-                <a:latin typeface="Noto Sans CJK KR"/>
-              </a:rPr>
-              <a:t>되기를</a:t>
-            </a:r>
-            <a:endParaRPr dirty="0">
-              <a:solidFill>
-                <a:srgbClr val="F6F5EF"/>
-              </a:solidFill>
-              <a:latin typeface="Noto Sans CJK KR"/>
-            </a:endParaRPr>
-          </a:p>
-          <a:p>
-            <a:pPr>
-              <a:defRPr sz="1300">
-                <a:solidFill>
-                  <a:srgbClr val="CFDCE6"/>
-                </a:solidFill>
-                <a:latin typeface="Aptos"/>
-              </a:defRPr>
-            </a:pPr>
-            <a:r>
-              <a:rPr dirty="0">
-                <a:solidFill>
-                  <a:srgbClr val="CFDCE6"/>
-                </a:solidFill>
-                <a:latin typeface="Noto Sans CJK KR"/>
-              </a:rPr>
-              <a:t>   </a:t>
-            </a:r>
-            <a:r>
-              <a:rPr sz="2000" b="1" dirty="0">
-                <a:solidFill>
-                  <a:srgbClr val="CFDCE6"/>
-                </a:solidFill>
-                <a:latin typeface="Noto Sans CJK KR"/>
-              </a:rPr>
-              <a:t>May the Gospel become real and </a:t>
-            </a:r>
-            <a:r>
-              <a:rPr sz="2000" b="1" dirty="0" err="1">
-                <a:solidFill>
-                  <a:srgbClr val="CFDCE6"/>
-                </a:solidFill>
-                <a:latin typeface="Noto Sans CJK KR"/>
-              </a:rPr>
-              <a:t>eviden</a:t>
-            </a:r>
-            <a:r>
-              <a:rPr lang="en-AU" sz="2000" b="1" dirty="0">
-                <a:solidFill>
-                  <a:srgbClr val="CFDCE6"/>
-                </a:solidFill>
-                <a:latin typeface="Noto Sans CJK KR"/>
-              </a:rPr>
-              <a:t>t</a:t>
-            </a:r>
-            <a:r>
-              <a:rPr sz="2000" b="1" dirty="0">
-                <a:solidFill>
-                  <a:srgbClr val="CFDCE6"/>
-                </a:solidFill>
-                <a:latin typeface="Noto Sans CJK KR"/>
-              </a:rPr>
-              <a:t> in my life</a:t>
-            </a:r>
-            <a:r>
-              <a:rPr b="1" dirty="0">
-                <a:solidFill>
-                  <a:srgbClr val="CFDCE6"/>
-                </a:solidFill>
-                <a:latin typeface="Noto Sans CJK KR"/>
-              </a:rPr>
-              <a:t>.</a:t>
-            </a:r>
-          </a:p>
-        </p:txBody>
-      </p:sp>
-      <p:sp>
-        <p:nvSpPr>
-          <p:cNvPr id="7" name="TextBox 6"/>
+            <a:r>
+              <a:rPr b="1" sz="1400">
+                <a:solidFill>
+                  <a:srgbClr val="056BA6"/>
+                </a:solidFill>
+              </a:rPr>
+              <a:t>• 1. 하나님이 만드신 원래의 나를 회복하도록  |  To restore the original self created by God</a:t>
+            </a:r>
+          </a:p>
+          <a:p>
+            <a:r>
+              <a:rPr b="1" sz="1250">
+                <a:solidFill>
+                  <a:srgbClr val="1E293B"/>
+                </a:solidFill>
+              </a:rPr>
+              <a:t>   1) 하나님을 닮은 나 (The 'me' who resembles God)           2) 안 되는 게 없던 나 (The 'me' for whom nothing was impossible)</a:t>
+            </a:r>
+          </a:p>
+          <a:p>
+            <a:r>
+              <a:rPr b="1" sz="1250">
+                <a:solidFill>
+                  <a:srgbClr val="1E293B"/>
+                </a:solidFill>
+              </a:rPr>
+              <a:t>   3) 모든 것이 만족되던 나 (The 'me' who was fully satisfied in all things)           4) 모든 것이 다스려지던 나 (The 'me' who had dominion over all things)</a:t>
+            </a:r>
+          </a:p>
+        </p:txBody>
+      </p:sp>
+      <p:sp>
+        <p:nvSpPr>
+          <p:cNvPr id="29" name="TextBox 28"/>
           <p:cNvSpPr txBox="1"/>
           <p:nvPr/>
         </p:nvSpPr>
         <p:spPr>
           <a:xfrm>
-            <a:off x="822960" y="3182112"/>
-            <a:ext cx="10607040" cy="677108"/>
+            <a:off x="777240" y="3931920"/>
+            <a:ext cx="10607040" cy="2377440"/>
           </a:xfrm>
           <a:prstGeom prst="rect">
             <a:avLst/>
@@ -5606,348 +5509,54 @@
           </a:bodyPr>
           <a:lstStyle/>
           <a:p>
-            <a:pPr>
-              <a:defRPr sz="1800" b="1">
-                <a:solidFill>
-                  <a:srgbClr val="F6F5EF"/>
-                </a:solidFill>
-                <a:latin typeface="Noto Sans CJK KR"/>
-              </a:defRPr>
-            </a:pPr>
-            <a:r>
-              <a:rPr dirty="0">
-                <a:solidFill>
-                  <a:srgbClr val="F6F5EF"/>
-                </a:solidFill>
-                <a:latin typeface="Noto Sans CJK KR"/>
-              </a:rPr>
-              <a:t>• </a:t>
-            </a:r>
-            <a:r>
-              <a:rPr dirty="0" err="1">
-                <a:solidFill>
-                  <a:srgbClr val="F6F5EF"/>
-                </a:solidFill>
-                <a:latin typeface="Noto Sans CJK KR"/>
-              </a:rPr>
-              <a:t>무기력하게</a:t>
-            </a:r>
-            <a:r>
-              <a:rPr dirty="0">
-                <a:solidFill>
-                  <a:srgbClr val="F6F5EF"/>
-                </a:solidFill>
-                <a:latin typeface="Noto Sans CJK KR"/>
-              </a:rPr>
-              <a:t> </a:t>
-            </a:r>
-            <a:r>
-              <a:rPr dirty="0" err="1">
-                <a:solidFill>
-                  <a:srgbClr val="F6F5EF"/>
-                </a:solidFill>
-                <a:latin typeface="Noto Sans CJK KR"/>
-              </a:rPr>
-              <a:t>느껴지는</a:t>
-            </a:r>
-            <a:r>
-              <a:rPr dirty="0">
-                <a:solidFill>
-                  <a:srgbClr val="F6F5EF"/>
-                </a:solidFill>
-                <a:latin typeface="Noto Sans CJK KR"/>
-              </a:rPr>
-              <a:t> </a:t>
-            </a:r>
-            <a:r>
-              <a:rPr dirty="0" err="1">
-                <a:solidFill>
-                  <a:srgbClr val="F6F5EF"/>
-                </a:solidFill>
-                <a:latin typeface="Noto Sans CJK KR"/>
-              </a:rPr>
-              <a:t>그리스도가</a:t>
-            </a:r>
-            <a:r>
-              <a:rPr dirty="0">
-                <a:solidFill>
-                  <a:srgbClr val="F6F5EF"/>
-                </a:solidFill>
-                <a:latin typeface="Noto Sans CJK KR"/>
-              </a:rPr>
-              <a:t> </a:t>
-            </a:r>
-            <a:r>
-              <a:rPr dirty="0" err="1">
-                <a:solidFill>
-                  <a:srgbClr val="F6F5EF"/>
-                </a:solidFill>
-                <a:latin typeface="Noto Sans CJK KR"/>
-              </a:rPr>
-              <a:t>아니라</a:t>
-            </a:r>
-            <a:r>
-              <a:rPr dirty="0">
-                <a:solidFill>
-                  <a:srgbClr val="F6F5EF"/>
-                </a:solidFill>
-                <a:latin typeface="Noto Sans CJK KR"/>
-              </a:rPr>
-              <a:t>, </a:t>
-            </a:r>
-            <a:r>
-              <a:rPr dirty="0" err="1">
-                <a:solidFill>
-                  <a:srgbClr val="F6F5EF"/>
-                </a:solidFill>
-                <a:latin typeface="Noto Sans CJK KR"/>
-              </a:rPr>
-              <a:t>성경에</a:t>
-            </a:r>
-            <a:r>
-              <a:rPr dirty="0">
-                <a:solidFill>
-                  <a:srgbClr val="F6F5EF"/>
-                </a:solidFill>
-                <a:latin typeface="Noto Sans CJK KR"/>
-              </a:rPr>
-              <a:t> </a:t>
-            </a:r>
-            <a:r>
-              <a:rPr dirty="0" err="1">
-                <a:solidFill>
-                  <a:srgbClr val="F6F5EF"/>
-                </a:solidFill>
-                <a:latin typeface="Noto Sans CJK KR"/>
-              </a:rPr>
-              <a:t>나타난</a:t>
-            </a:r>
-            <a:r>
-              <a:rPr dirty="0">
-                <a:solidFill>
-                  <a:srgbClr val="F6F5EF"/>
-                </a:solidFill>
-                <a:latin typeface="Noto Sans CJK KR"/>
-              </a:rPr>
-              <a:t> </a:t>
-            </a:r>
-            <a:r>
-              <a:rPr dirty="0" err="1">
-                <a:solidFill>
-                  <a:srgbClr val="F6F5EF"/>
-                </a:solidFill>
-                <a:latin typeface="Noto Sans CJK KR"/>
-              </a:rPr>
-              <a:t>능력의</a:t>
-            </a:r>
-            <a:r>
-              <a:rPr dirty="0">
-                <a:solidFill>
-                  <a:srgbClr val="F6F5EF"/>
-                </a:solidFill>
-                <a:latin typeface="Noto Sans CJK KR"/>
-              </a:rPr>
-              <a:t> </a:t>
-            </a:r>
-            <a:r>
-              <a:rPr dirty="0" err="1">
-                <a:solidFill>
-                  <a:srgbClr val="F6F5EF"/>
-                </a:solidFill>
-                <a:latin typeface="Noto Sans CJK KR"/>
-              </a:rPr>
-              <a:t>그리스도를</a:t>
-            </a:r>
-            <a:r>
-              <a:rPr dirty="0">
-                <a:solidFill>
-                  <a:srgbClr val="F6F5EF"/>
-                </a:solidFill>
-                <a:latin typeface="Noto Sans CJK KR"/>
-              </a:rPr>
-              <a:t> </a:t>
-            </a:r>
-            <a:r>
-              <a:rPr dirty="0" err="1">
-                <a:solidFill>
-                  <a:srgbClr val="F6F5EF"/>
-                </a:solidFill>
-                <a:latin typeface="Noto Sans CJK KR"/>
-              </a:rPr>
-              <a:t>누리기를</a:t>
-            </a:r>
-            <a:endParaRPr dirty="0">
-              <a:solidFill>
-                <a:srgbClr val="F6F5EF"/>
-              </a:solidFill>
-              <a:latin typeface="Noto Sans CJK KR"/>
-            </a:endParaRPr>
-          </a:p>
-          <a:p>
-            <a:pPr>
-              <a:defRPr sz="1300">
-                <a:solidFill>
-                  <a:srgbClr val="CFDCE6"/>
-                </a:solidFill>
-                <a:latin typeface="Aptos"/>
-              </a:defRPr>
-            </a:pPr>
-            <a:r>
-              <a:rPr dirty="0">
-                <a:solidFill>
-                  <a:srgbClr val="CFDCE6"/>
-                </a:solidFill>
-                <a:latin typeface="Noto Sans CJK KR"/>
-              </a:rPr>
-              <a:t>   </a:t>
-            </a:r>
-            <a:r>
-              <a:rPr sz="2000" b="1" dirty="0">
-                <a:solidFill>
-                  <a:srgbClr val="CFDCE6"/>
-                </a:solidFill>
-                <a:latin typeface="Noto Sans CJK KR"/>
-              </a:rPr>
-              <a:t>May I experience Christ not as powerless, but as the powerful Christ revealed in Scripture</a:t>
-            </a:r>
-            <a:r>
-              <a:rPr dirty="0">
-                <a:solidFill>
-                  <a:srgbClr val="CFDCE6"/>
-                </a:solidFill>
-                <a:latin typeface="Noto Sans CJK KR"/>
-              </a:rPr>
-              <a:t>.</a:t>
-            </a:r>
-          </a:p>
-        </p:txBody>
-      </p:sp>
-      <p:sp>
-        <p:nvSpPr>
-          <p:cNvPr id="8" name="TextBox 7"/>
-          <p:cNvSpPr txBox="1"/>
-          <p:nvPr/>
-        </p:nvSpPr>
-        <p:spPr>
-          <a:xfrm>
-            <a:off x="822960" y="4032504"/>
-            <a:ext cx="10607040" cy="677108"/>
-          </a:xfrm>
-          <a:prstGeom prst="rect">
-            <a:avLst/>
-          </a:prstGeom>
-          <a:noFill/>
-        </p:spPr>
-        <p:txBody>
-          <a:bodyPr wrap="square">
-            <a:spAutoFit/>
-          </a:bodyPr>
-          <a:lstStyle/>
-          <a:p>
-            <a:pPr>
-              <a:defRPr sz="1800" b="1">
-                <a:solidFill>
-                  <a:srgbClr val="F6F5EF"/>
-                </a:solidFill>
-                <a:latin typeface="Noto Sans CJK KR"/>
-              </a:defRPr>
-            </a:pPr>
-            <a:r>
-              <a:rPr sz="1800" dirty="0">
-                <a:solidFill>
-                  <a:srgbClr val="F6F5EF"/>
-                </a:solidFill>
-                <a:latin typeface="Noto Sans CJK KR"/>
-              </a:rPr>
-              <a:t>• Up &amp; Down</a:t>
-            </a:r>
-            <a:r>
-              <a:rPr lang="en-AU" dirty="0">
-                <a:solidFill>
-                  <a:srgbClr val="F6F5EF"/>
-                </a:solidFill>
-                <a:latin typeface="Noto Sans CJK KR"/>
-              </a:rPr>
-              <a:t> </a:t>
-            </a:r>
-            <a:r>
-              <a:rPr lang="ko-KR" altLang="en-US" dirty="0">
-                <a:solidFill>
-                  <a:srgbClr val="F6F5EF"/>
-                </a:solidFill>
-                <a:latin typeface="Noto Sans CJK KR"/>
-              </a:rPr>
-              <a:t>되지 않는 항상이 되기를</a:t>
-            </a:r>
-            <a:r>
-              <a:rPr lang="en-AU" altLang="ko-KR" dirty="0">
-                <a:solidFill>
-                  <a:srgbClr val="F6F5EF"/>
-                </a:solidFill>
-                <a:latin typeface="Noto Sans CJK KR"/>
-              </a:rPr>
-              <a:t>-</a:t>
-            </a:r>
-            <a:r>
-              <a:rPr sz="1800" dirty="0">
-                <a:solidFill>
-                  <a:srgbClr val="F6F5EF"/>
-                </a:solidFill>
-                <a:latin typeface="Noto Sans CJK KR"/>
-              </a:rPr>
-              <a:t> </a:t>
-            </a:r>
-            <a:r>
-              <a:rPr lang="ko-KR" altLang="en-US" sz="1800" dirty="0">
-                <a:solidFill>
-                  <a:srgbClr val="F6F5EF"/>
-                </a:solidFill>
-                <a:latin typeface="Noto Sans CJK KR"/>
-              </a:rPr>
-              <a:t>성경속 </a:t>
-            </a:r>
-            <a:r>
-              <a:rPr sz="1800" dirty="0" err="1">
-                <a:solidFill>
-                  <a:srgbClr val="F6F5EF"/>
-                </a:solidFill>
-                <a:latin typeface="Noto Sans CJK KR"/>
-              </a:rPr>
-              <a:t>다니엘처럼</a:t>
-            </a:r>
-            <a:endParaRPr sz="1800" dirty="0">
-              <a:solidFill>
-                <a:srgbClr val="F6F5EF"/>
-              </a:solidFill>
-              <a:latin typeface="Noto Sans CJK KR"/>
-            </a:endParaRPr>
-          </a:p>
-          <a:p>
-            <a:pPr>
-              <a:defRPr sz="1300">
-                <a:solidFill>
-                  <a:srgbClr val="CFDCE6"/>
-                </a:solidFill>
-                <a:latin typeface="Aptos"/>
-              </a:defRPr>
-            </a:pPr>
-            <a:r>
-              <a:rPr dirty="0">
-                <a:solidFill>
-                  <a:srgbClr val="CFDCE6"/>
-                </a:solidFill>
-                <a:latin typeface="Noto Sans CJK KR"/>
-              </a:rPr>
-              <a:t>   </a:t>
-            </a:r>
-            <a:r>
-              <a:rPr sz="2000" b="1" dirty="0">
-                <a:solidFill>
-                  <a:srgbClr val="CFDCE6"/>
-                </a:solidFill>
-                <a:latin typeface="Noto Sans CJK KR"/>
-              </a:rPr>
-              <a:t>May my faith remain steady like Daniel’s, not controlled by spiritual ups and downs.</a:t>
+            <a:r>
+              <a:rPr b="1" sz="1300">
+                <a:solidFill>
+                  <a:srgbClr val="BF7314"/>
+                </a:solidFill>
+              </a:rPr>
+              <a:t>• 2. 원죄 — 절대 절망의 우리의 상태를 당연하게 인정하므로 복음 말고 살 길 없는 나를 발견하도록</a:t>
+            </a:r>
+          </a:p>
+          <a:p>
+            <a:r>
+              <a:rPr b="1" sz="1300">
+                <a:solidFill>
+                  <a:srgbClr val="BF7314"/>
+                </a:solidFill>
+              </a:rPr>
+              <a:t>   Acknowledging our state of absolute despair through Original Sin, to discover that without the Gospel there is no way to live</a:t>
+            </a:r>
+          </a:p>
+          <a:p>
+            <a:r>
+              <a:rPr b="1" sz="1200">
+                <a:solidFill>
+                  <a:srgbClr val="1E293B"/>
+                </a:solidFill>
+              </a:rPr>
+              <a:t>   1) 모든 것이 안 되는 나  (The 'me' for whom nothing works)</a:t>
+            </a:r>
+          </a:p>
+          <a:p>
+            <a:r>
+              <a:rPr b="1" sz="1200">
+                <a:solidFill>
+                  <a:srgbClr val="1E293B"/>
+                </a:solidFill>
+              </a:rPr>
+              <a:t>   2) 문제 속에 살 수밖에 없는 나  (The 'me' who cannot help but live inside problems)</a:t>
+            </a:r>
+          </a:p>
+          <a:p>
+            <a:r>
+              <a:rPr b="1" sz="1200">
+                <a:solidFill>
+                  <a:srgbClr val="B82626"/>
+                </a:solidFill>
+              </a:rPr>
+              <a:t>   3) 영적문제, 우상문제, 정신문제, 육신문제, 내세문제, 후대문제
+       (Spiritual, idolatry, mental, physical, afterlife, and next-generation problems)</a:t>
             </a:r>
           </a:p>
         </p:txBody>

--- a/어라이즈 넥스트젠 2026.10 [1].pptx
+++ b/어라이즈 넥스트젠 2026.10 [1].pptx
@@ -10,6 +10,7 @@
     <p:sldId id="259" r:id="rId4"/>
     <p:sldId id="266" r:id="rId5"/>
     <p:sldId id="260" r:id="rId6"/>
+    <p:sldId id="267" r:id="rId17"/>
     <p:sldId id="261" r:id="rId7"/>
     <p:sldId id="262" r:id="rId8"/>
     <p:sldId id="264" r:id="rId9"/>
@@ -3660,6 +3661,249 @@
 </p:sld>
 </file>
 
+<file path=ppt/slides/slide10.xml><?xml version="1.0" encoding="utf-8"?>
+<p:sld xmlns:a="http://schemas.openxmlformats.org/drawingml/2006/main" xmlns:p="http://schemas.openxmlformats.org/presentationml/2006/main" xmlns:r="http://schemas.openxmlformats.org/officeDocument/2006/relationships">
+  <p:cSld>
+    <p:bg>
+      <p:bgPr>
+        <a:solidFill>
+          <a:srgbClr val="F8F6F0"/>
+        </a:solidFill>
+        <a:effectLst/>
+      </p:bgPr>
+    </p:bg>
+    <p:spTree>
+      <p:nvGrpSpPr>
+        <p:cNvPr id="1" name=""/>
+        <p:cNvGrpSpPr/>
+        <p:nvPr/>
+      </p:nvGrpSpPr>
+      <p:grpSpPr/>
+      <p:sp>
+        <p:nvSpPr>
+          <p:cNvPr id="2" name="TextBox 1"/>
+          <p:cNvSpPr txBox="1"/>
+          <p:nvPr/>
+        </p:nvSpPr>
+        <p:spPr>
+          <a:xfrm>
+            <a:off x="621792" y="384048"/>
+            <a:ext cx="10332720" cy="777240"/>
+          </a:xfrm>
+          <a:prstGeom prst="rect">
+            <a:avLst/>
+          </a:prstGeom>
+          <a:noFill/>
+        </p:spPr>
+        <p:txBody>
+          <a:bodyPr wrap="none">
+            <a:spAutoFit/>
+          </a:bodyPr>
+          <a:lstStyle/>
+          <a:p>
+            <a:r>
+              <a:rPr b="1" sz="2800">
+                <a:solidFill>
+                  <a:srgbClr val="122947"/>
+                </a:solidFill>
+              </a:rPr>
+              <a:t>2. 나를 위한 기도</a:t>
+            </a:r>
+          </a:p>
+          <a:p>
+            <a:r>
+              <a:rPr b="1" sz="2000">
+                <a:solidFill>
+                  <a:srgbClr val="5A6B7C"/>
+                </a:solidFill>
+              </a:rPr>
+              <a:t>2. Prayer for Myself</a:t>
+            </a:r>
+          </a:p>
+        </p:txBody>
+      </p:sp>
+      <p:sp>
+        <p:nvSpPr>
+          <p:cNvPr id="3" name="Rectangle 2"/>
+          <p:cNvSpPr/>
+          <p:nvPr/>
+        </p:nvSpPr>
+        <p:spPr>
+          <a:xfrm>
+            <a:off x="621792" y="1280160"/>
+            <a:ext cx="1051560" cy="36576"/>
+          </a:xfrm>
+          <a:prstGeom prst="rect">
+            <a:avLst/>
+          </a:prstGeom>
+          <a:solidFill>
+            <a:srgbClr val="BF8C26"/>
+          </a:solidFill>
+          <a:ln>
+            <a:noFill/>
+          </a:ln>
+        </p:spPr>
+        <p:style>
+          <a:lnRef idx="1">
+            <a:schemeClr val="accent1"/>
+          </a:lnRef>
+          <a:fillRef idx="3">
+            <a:schemeClr val="accent1"/>
+          </a:fillRef>
+          <a:effectRef idx="2">
+            <a:schemeClr val="accent1"/>
+          </a:effectRef>
+          <a:fontRef idx="minor">
+            <a:schemeClr val="lt1"/>
+          </a:fontRef>
+        </p:style>
+        <p:txBody>
+          <a:bodyPr rtlCol="0" anchor="ctr"/>
+          <a:lstStyle/>
+          <a:p>
+            <a:pPr algn="ctr"/>
+          </a:p>
+        </p:txBody>
+      </p:sp>
+      <p:sp>
+        <p:nvSpPr>
+          <p:cNvPr id="4" name="TextBox 3"/>
+          <p:cNvSpPr txBox="1"/>
+          <p:nvPr/>
+        </p:nvSpPr>
+        <p:spPr>
+          <a:xfrm>
+            <a:off x="777240" y="1463040"/>
+            <a:ext cx="10058400" cy="548640"/>
+          </a:xfrm>
+          <a:prstGeom prst="rect">
+            <a:avLst/>
+          </a:prstGeom>
+          <a:noFill/>
+        </p:spPr>
+        <p:txBody>
+          <a:bodyPr wrap="none">
+            <a:spAutoFit/>
+          </a:bodyPr>
+          <a:lstStyle/>
+          <a:p>
+            <a:r>
+              <a:rPr b="1" sz="1700">
+                <a:solidFill>
+                  <a:srgbClr val="122947"/>
+                </a:solidFill>
+              </a:rPr>
+              <a:t>“내가 제일 중요하다”  |  “I must begin with myself.”</a:t>
+            </a:r>
+          </a:p>
+        </p:txBody>
+      </p:sp>
+      <p:sp>
+        <p:nvSpPr>
+          <p:cNvPr id="5" name="TextBox 4"/>
+          <p:cNvSpPr txBox="1"/>
+          <p:nvPr/>
+        </p:nvSpPr>
+        <p:spPr>
+          <a:xfrm>
+            <a:off x="777240" y="2194560"/>
+            <a:ext cx="10515600" cy="3840480"/>
+          </a:xfrm>
+          <a:prstGeom prst="rect">
+            <a:avLst/>
+          </a:prstGeom>
+          <a:noFill/>
+        </p:spPr>
+        <p:txBody>
+          <a:bodyPr wrap="square">
+            <a:spAutoFit/>
+          </a:bodyPr>
+          <a:lstStyle/>
+          <a:p>
+            <a:r>
+              <a:rPr b="1" sz="1650">
+                <a:solidFill>
+                  <a:srgbClr val="1A1F29"/>
+                </a:solidFill>
+              </a:rPr>
+              <a:t>• 내가 복음이 되기를</a:t>
+            </a:r>
+          </a:p>
+          <a:p>
+            <a:pPr>
+              <a:spcAft>
+                <a:spcPts val="2200"/>
+              </a:spcAft>
+            </a:pPr>
+            <a:r>
+              <a:rPr b="1" sz="1650">
+                <a:solidFill>
+                  <a:srgbClr val="475970"/>
+                </a:solidFill>
+              </a:rPr>
+              <a:t>   May the Gospel become real and evident in my life.</a:t>
+            </a:r>
+          </a:p>
+          <a:p>
+            <a:r>
+              <a:rPr b="1" sz="1650">
+                <a:solidFill>
+                  <a:srgbClr val="1A1F29"/>
+                </a:solidFill>
+              </a:rPr>
+              <a:t>• 무기력하게 느껴지는 그리스도가 아니라, 성경에 나타난 능력의 그리스도를 누리기를</a:t>
+            </a:r>
+          </a:p>
+          <a:p>
+            <a:pPr>
+              <a:spcAft>
+                <a:spcPts val="2200"/>
+              </a:spcAft>
+            </a:pPr>
+            <a:r>
+              <a:rPr b="1" sz="1650">
+                <a:solidFill>
+                  <a:srgbClr val="475970"/>
+                </a:solidFill>
+              </a:rPr>
+              <a:t>   May I experience Christ not as powerless, but as the powerful Christ revealed in Scripture.</a:t>
+            </a:r>
+          </a:p>
+          <a:p>
+            <a:r>
+              <a:rPr b="1" sz="1650">
+                <a:solidFill>
+                  <a:srgbClr val="1A1F29"/>
+                </a:solidFill>
+              </a:rPr>
+              <a:t>• Up &amp; Down에 흔들리지 않고 다니엘처럼 항상 한결같은 믿음이 되기를</a:t>
+            </a:r>
+          </a:p>
+          <a:p>
+            <a:pPr>
+              <a:spcAft>
+                <a:spcPts val="2200"/>
+              </a:spcAft>
+            </a:pPr>
+            <a:r>
+              <a:rPr b="1" sz="1650">
+                <a:solidFill>
+                  <a:srgbClr val="475970"/>
+                </a:solidFill>
+              </a:rPr>
+              <a:t>   May my faith remain steady like Daniel’s, not controlled by spiritual ups and downs.</a:t>
+            </a:r>
+          </a:p>
+        </p:txBody>
+      </p:sp>
+    </p:spTree>
+  </p:cSld>
+  <p:clrMapOvr>
+    <a:masterClrMapping/>
+  </p:clrMapOvr>
+</p:sld>
+</file>
+
 <file path=ppt/slides/slide2.xml><?xml version="1.0" encoding="utf-8"?>
 <p:sld xmlns:a="http://schemas.openxmlformats.org/drawingml/2006/main" xmlns:r="http://schemas.openxmlformats.org/officeDocument/2006/relationships" xmlns:p="http://schemas.openxmlformats.org/presentationml/2006/main">
   <p:cSld>
@@ -5313,31 +5557,22 @@
               </a:defRPr>
             </a:pPr>
             <a:r>
-              <a:rPr sz="2800" b="1">
-                <a:solidFill>
-                  <a:srgbClr val="F6F5EF"/>
-                </a:solidFill>
-                <a:latin typeface="Noto Sans CJK KR"/>
-              </a:rPr>
-              <a:t>1. 나를 위한 기도</a:t>
-            </a:r>
-          </a:p>
-          <a:p>
-            <a:pPr>
-              <a:defRPr>
-                <a:solidFill>
-                  <a:srgbClr val="E6C581"/>
-                </a:solidFill>
-              </a:defRPr>
-            </a:pPr>
-            <a:r>
-              <a:rPr sz="2800">
-                <a:solidFill>
-                  <a:srgbClr val="E6C581"/>
-                </a:solidFill>
-                <a:latin typeface="Noto Sans CJK KR"/>
-              </a:rPr>
-              <a:t>1. Prayer for Myself</a:t>
+              <a:rPr b="1" sz="2800">
+                <a:solidFill>
+                  <a:srgbClr val="122947"/>
+                </a:solidFill>
+              </a:rPr>
+              <a:t>1. 메시지 기도</a:t>
+            </a:r>
+          </a:p>
+          <a:p>
+            <a:r>
+              <a:rPr b="1" sz="2000">
+                <a:solidFill>
+                  <a:srgbClr val="5A6B7C"/>
+                </a:solidFill>
+              </a:rPr>
+              <a:t>1. Message Prayer</a:t>
             </a:r>
           </a:p>
         </p:txBody>
@@ -5987,13 +6222,7 @@
               </a:defRPr>
             </a:pPr>
             <a:r>
-              <a:rPr sz="2800" b="1">
-                <a:solidFill>
-                  <a:srgbClr val="F6F5EF"/>
-                </a:solidFill>
-                <a:latin typeface="Noto Sans CJK KR"/>
-              </a:rPr>
-              <a:t>2. 모든 민족을 위한 기도</a:t>
+              <a:t>3. 모든 민족을 위한 기도</a:t>
             </a:r>
           </a:p>
           <a:p>
@@ -6005,13 +6234,7 @@
               </a:defRPr>
             </a:pPr>
             <a:r>
-              <a:rPr sz="2800">
-                <a:solidFill>
-                  <a:srgbClr val="E6C581"/>
-                </a:solidFill>
-                <a:latin typeface="Noto Sans CJK KR"/>
-              </a:rPr>
-              <a:t>2. Prayer for All Nations</a:t>
+              <a:t>3. Prayer for All Nations</a:t>
             </a:r>
           </a:p>
         </p:txBody>
@@ -6091,112 +6314,7 @@
               </a:defRPr>
             </a:pPr>
             <a:r>
-              <a:rPr dirty="0">
-                <a:solidFill>
-                  <a:srgbClr val="F6F5EF"/>
-                </a:solidFill>
-                <a:latin typeface="Noto Sans CJK KR"/>
-              </a:rPr>
-              <a:t>• </a:t>
-            </a:r>
-            <a:r>
-              <a:rPr dirty="0" err="1">
-                <a:solidFill>
-                  <a:srgbClr val="F6F5EF"/>
-                </a:solidFill>
-                <a:latin typeface="Noto Sans CJK KR"/>
-              </a:rPr>
-              <a:t>모든</a:t>
-            </a:r>
-            <a:r>
-              <a:rPr dirty="0">
-                <a:solidFill>
-                  <a:srgbClr val="F6F5EF"/>
-                </a:solidFill>
-                <a:latin typeface="Noto Sans CJK KR"/>
-              </a:rPr>
-              <a:t> </a:t>
-            </a:r>
-            <a:r>
-              <a:rPr dirty="0" err="1">
-                <a:solidFill>
-                  <a:srgbClr val="F6F5EF"/>
-                </a:solidFill>
-                <a:latin typeface="Noto Sans CJK KR"/>
-              </a:rPr>
-              <a:t>민족이</a:t>
-            </a:r>
-            <a:r>
-              <a:rPr dirty="0">
-                <a:solidFill>
-                  <a:srgbClr val="F6F5EF"/>
-                </a:solidFill>
-                <a:latin typeface="Noto Sans CJK KR"/>
-              </a:rPr>
-              <a:t> </a:t>
-            </a:r>
-            <a:r>
-              <a:rPr dirty="0" err="1">
-                <a:solidFill>
-                  <a:srgbClr val="F6F5EF"/>
-                </a:solidFill>
-                <a:latin typeface="Noto Sans CJK KR"/>
-              </a:rPr>
-              <a:t>그리스도</a:t>
-            </a:r>
-            <a:r>
-              <a:rPr dirty="0">
-                <a:solidFill>
-                  <a:srgbClr val="F6F5EF"/>
-                </a:solidFill>
-                <a:latin typeface="Noto Sans CJK KR"/>
-              </a:rPr>
-              <a:t> </a:t>
-            </a:r>
-            <a:r>
-              <a:rPr dirty="0" err="1">
-                <a:solidFill>
-                  <a:srgbClr val="F6F5EF"/>
-                </a:solidFill>
-                <a:latin typeface="Noto Sans CJK KR"/>
-              </a:rPr>
-              <a:t>앞에</a:t>
-            </a:r>
-            <a:r>
-              <a:rPr dirty="0">
-                <a:solidFill>
-                  <a:srgbClr val="F6F5EF"/>
-                </a:solidFill>
-                <a:latin typeface="Noto Sans CJK KR"/>
-              </a:rPr>
-              <a:t> </a:t>
-            </a:r>
-            <a:r>
-              <a:rPr dirty="0" err="1">
-                <a:solidFill>
-                  <a:srgbClr val="F6F5EF"/>
-                </a:solidFill>
-                <a:latin typeface="Noto Sans CJK KR"/>
-              </a:rPr>
-              <a:t>무릎</a:t>
-            </a:r>
-            <a:r>
-              <a:rPr dirty="0">
-                <a:solidFill>
-                  <a:srgbClr val="F6F5EF"/>
-                </a:solidFill>
-                <a:latin typeface="Noto Sans CJK KR"/>
-              </a:rPr>
-              <a:t> </a:t>
-            </a:r>
-            <a:r>
-              <a:rPr dirty="0" err="1">
-                <a:solidFill>
-                  <a:srgbClr val="F6F5EF"/>
-                </a:solidFill>
-                <a:latin typeface="Noto Sans CJK KR"/>
-              </a:rPr>
-              <a:t>꿇도록</a:t>
+              <a:t>• 모든 민족이 그리스도 앞에 무릎 꿇도록</a:t>
             </a:r>
             <a:endParaRPr dirty="0">
               <a:solidFill>
@@ -6215,22 +6333,7 @@
               </a:defRPr>
             </a:pPr>
             <a:r>
-              <a:rPr dirty="0">
-                <a:solidFill>
-                  <a:srgbClr val="CFDCE6"/>
-                </a:solidFill>
-                <a:latin typeface="Noto Sans CJK KR"/>
-              </a:rPr>
-              <a:t>   </a:t>
-            </a:r>
-            <a:r>
-              <a:rPr sz="2000" b="1" dirty="0">
-                <a:solidFill>
-                  <a:srgbClr val="CFDCE6"/>
-                </a:solidFill>
-                <a:latin typeface="Noto Sans CJK KR"/>
-              </a:rPr>
-              <a:t>May all nations bow before Christ.</a:t>
+              <a:t>   May all nations bow before Christ.</a:t>
             </a:r>
           </a:p>
         </p:txBody>
@@ -6975,13 +7078,7 @@
               </a:defRPr>
             </a:pPr>
             <a:r>
-              <a:rPr sz="2800" b="1">
-                <a:solidFill>
-                  <a:srgbClr val="F6F5EF"/>
-                </a:solidFill>
-                <a:latin typeface="Noto Sans CJK KR"/>
-              </a:rPr>
-              <a:t>3. 후대를 위한 기도</a:t>
+              <a:t>4. 후대를 위한 기도</a:t>
             </a:r>
           </a:p>
           <a:p>
@@ -6993,13 +7090,7 @@
               </a:defRPr>
             </a:pPr>
             <a:r>
-              <a:rPr sz="2800">
-                <a:solidFill>
-                  <a:srgbClr val="E6C581"/>
-                </a:solidFill>
-                <a:latin typeface="Noto Sans CJK KR"/>
-              </a:rPr>
-              <a:t>3. Prayer for the Next Generation</a:t>
+              <a:t>4. Prayer for the Next Generation</a:t>
             </a:r>
           </a:p>
         </p:txBody>
@@ -7079,58 +7170,7 @@
               </a:defRPr>
             </a:pPr>
             <a:r>
-              <a:rPr dirty="0">
-                <a:solidFill>
-                  <a:srgbClr val="F6F5EF"/>
-                </a:solidFill>
-                <a:latin typeface="Noto Sans CJK KR"/>
-              </a:rPr>
-              <a:t>• </a:t>
-            </a:r>
-            <a:r>
-              <a:rPr dirty="0" err="1">
-                <a:solidFill>
-                  <a:srgbClr val="F6F5EF"/>
-                </a:solidFill>
-                <a:latin typeface="Noto Sans CJK KR"/>
-              </a:rPr>
-              <a:t>후대가</a:t>
-            </a:r>
-            <a:r>
-              <a:rPr dirty="0">
-                <a:solidFill>
-                  <a:srgbClr val="F6F5EF"/>
-                </a:solidFill>
-                <a:latin typeface="Noto Sans CJK KR"/>
-              </a:rPr>
-              <a:t> </a:t>
-            </a:r>
-            <a:r>
-              <a:rPr dirty="0" err="1">
-                <a:solidFill>
-                  <a:srgbClr val="F6F5EF"/>
-                </a:solidFill>
-                <a:latin typeface="Noto Sans CJK KR"/>
-              </a:rPr>
-              <a:t>복음을</a:t>
-            </a:r>
-            <a:r>
-              <a:rPr dirty="0">
-                <a:solidFill>
-                  <a:srgbClr val="F6F5EF"/>
-                </a:solidFill>
-                <a:latin typeface="Noto Sans CJK KR"/>
-              </a:rPr>
-              <a:t> </a:t>
-            </a:r>
-            <a:r>
-              <a:rPr dirty="0" err="1">
-                <a:solidFill>
-                  <a:srgbClr val="F6F5EF"/>
-                </a:solidFill>
-                <a:latin typeface="Noto Sans CJK KR"/>
-              </a:rPr>
-              <a:t>알도록</a:t>
+              <a:t>• 후대가 복음을 알도록</a:t>
             </a:r>
             <a:endParaRPr dirty="0">
               <a:solidFill>
@@ -7149,22 +7189,7 @@
               </a:defRPr>
             </a:pPr>
             <a:r>
-              <a:rPr dirty="0">
-                <a:solidFill>
-                  <a:srgbClr val="CFDCE6"/>
-                </a:solidFill>
-                <a:latin typeface="Noto Sans CJK KR"/>
-              </a:rPr>
-              <a:t>   </a:t>
-            </a:r>
-            <a:r>
-              <a:rPr sz="2000" b="1" dirty="0">
-                <a:solidFill>
-                  <a:srgbClr val="CFDCE6"/>
-                </a:solidFill>
-                <a:latin typeface="Noto Sans CJK KR"/>
-              </a:rPr>
-              <a:t>May the next generation know the Gospel.</a:t>
+              <a:t>   May the next generation know the Gospel.</a:t>
             </a:r>
           </a:p>
         </p:txBody>

--- a/어라이즈 넥스트젠 2026.10 [1].pptx
+++ b/어라이즈 넥스트젠 2026.10 [1].pptx
@@ -3662,12 +3662,12 @@
 </file>
 
 <file path=ppt/slides/slide10.xml><?xml version="1.0" encoding="utf-8"?>
-<p:sld xmlns:a="http://schemas.openxmlformats.org/drawingml/2006/main" xmlns:p="http://schemas.openxmlformats.org/presentationml/2006/main" xmlns:r="http://schemas.openxmlformats.org/officeDocument/2006/relationships">
+<p:sld xmlns:a="http://schemas.openxmlformats.org/drawingml/2006/main" xmlns:r="http://schemas.openxmlformats.org/officeDocument/2006/relationships" xmlns:p="http://schemas.openxmlformats.org/presentationml/2006/main">
   <p:cSld>
     <p:bg>
       <p:bgPr>
         <a:solidFill>
-          <a:srgbClr val="F8F6F0"/>
+          <a:srgbClr val="1C2A38"/>
         </a:solidFill>
         <a:effectLst/>
       </p:bgPr>
@@ -3678,17 +3678,82 @@
         <p:cNvGrpSpPr/>
         <p:nvPr/>
       </p:nvGrpSpPr>
-      <p:grpSpPr/>
-      <p:sp>
-        <p:nvSpPr>
-          <p:cNvPr id="2" name="TextBox 1"/>
+      <p:grpSpPr>
+        <a:xfrm>
+          <a:off x="0" y="0"/>
+          <a:ext cx="0" cy="0"/>
+          <a:chOff x="0" y="0"/>
+          <a:chExt cx="0" cy="0"/>
+        </a:xfrm>
+      </p:grpSpPr>
+      <p:sp>
+        <p:nvSpPr>
+          <p:cNvPr id="2" name="Rectangle 1"/>
+          <p:cNvSpPr/>
+          <p:nvPr/>
+        </p:nvSpPr>
+        <p:spPr>
+          <a:xfrm>
+            <a:off x="0" y="0"/>
+            <a:ext cx="12192000" cy="6858000"/>
+          </a:xfrm>
+          <a:prstGeom prst="rect">
+            <a:avLst/>
+          </a:prstGeom>
+          <a:gradFill rotWithShape="1">
+            <a:gsLst>
+              <a:gs pos="0">
+                <a:srgbClr val="081725"/>
+              </a:gs>
+              <a:gs pos="60000">
+                <a:srgbClr val="10273C"/>
+              </a:gs>
+              <a:gs pos="90000">
+                <a:srgbClr val="174450"/>
+              </a:gs>
+              <a:gs pos="100000">
+                <a:srgbClr val="66583F"/>
+              </a:gs>
+            </a:gsLst>
+            <a:lin ang="2700000" scaled="1"/>
+          </a:gradFill>
+          <a:ln>
+            <a:noFill/>
+          </a:ln>
+        </p:spPr>
+        <p:style>
+          <a:lnRef idx="1">
+            <a:schemeClr val="accent1"/>
+          </a:lnRef>
+          <a:fillRef idx="3">
+            <a:schemeClr val="accent1"/>
+          </a:fillRef>
+          <a:effectRef idx="2">
+            <a:schemeClr val="accent1"/>
+          </a:effectRef>
+          <a:fontRef idx="minor">
+            <a:schemeClr val="lt1"/>
+          </a:fontRef>
+        </p:style>
+        <p:txBody>
+          <a:bodyPr rtlCol="0" anchor="ctr"/>
+          <a:lstStyle/>
+          <a:p>
+            <a:pPr algn="ctr"/>
+            <a:endParaRPr/>
+          </a:p>
+        </p:txBody>
+      </p:sp>
+      <p:sp>
+        <p:nvSpPr>
+          <p:cNvPr id="3" name="TextBox 2"/>
           <p:cNvSpPr txBox="1"/>
           <p:nvPr/>
         </p:nvSpPr>
         <p:spPr>
           <a:xfrm>
-            <a:off x="621792" y="384048"/>
-            <a:ext cx="10332720" cy="777240"/>
+            <a:off x="658368" y="411480"/>
+            <a:ext cx="10881360" cy="822960"/>
           </a:xfrm>
           <a:prstGeom prst="rect">
             <a:avLst/>
@@ -3701,43 +3766,59 @@
           </a:bodyPr>
           <a:lstStyle/>
           <a:p>
-            <a:r>
-              <a:rPr b="1" sz="2800">
-                <a:solidFill>
-                  <a:srgbClr val="122947"/>
-                </a:solidFill>
-              </a:rPr>
-              <a:t>2. 나를 위한 기도</a:t>
-            </a:r>
-          </a:p>
-          <a:p>
-            <a:r>
-              <a:rPr b="1" sz="2000">
-                <a:solidFill>
-                  <a:srgbClr val="5A6B7C"/>
-                </a:solidFill>
-              </a:rPr>
-              <a:t>2. Prayer for Myself</a:t>
-            </a:r>
-          </a:p>
-        </p:txBody>
-      </p:sp>
-      <p:sp>
-        <p:nvSpPr>
-          <p:cNvPr id="3" name="Rectangle 2"/>
+            <a:pPr>
+              <a:defRPr>
+                <a:solidFill>
+                  <a:srgbClr val="F6F5EF"/>
+                </a:solidFill>
+              </a:defRPr>
+            </a:pPr>
+            <a:r>
+              <a:rPr sz="2800" b="1">
+                <a:solidFill>
+                  <a:srgbClr val="F6F5EF"/>
+                </a:solidFill>
+                <a:latin typeface="Noto Sans CJK KR"/>
+              </a:rPr>
+              <a:t>광고</a:t>
+            </a:r>
+          </a:p>
+          <a:p>
+            <a:pPr>
+              <a:defRPr>
+                <a:solidFill>
+                  <a:srgbClr val="E6C581"/>
+                </a:solidFill>
+              </a:defRPr>
+            </a:pPr>
+            <a:r>
+              <a:rPr sz="2800">
+                <a:solidFill>
+                  <a:srgbClr val="E6C581"/>
+                </a:solidFill>
+                <a:latin typeface="Noto Sans CJK KR"/>
+              </a:rPr>
+              <a:t>Announcements</a:t>
+            </a:r>
+          </a:p>
+        </p:txBody>
+      </p:sp>
+      <p:sp>
+        <p:nvSpPr>
+          <p:cNvPr id="4" name="Rectangle 3"/>
           <p:cNvSpPr/>
           <p:nvPr/>
         </p:nvSpPr>
         <p:spPr>
           <a:xfrm>
-            <a:off x="621792" y="1280160"/>
-            <a:ext cx="1051560" cy="36576"/>
+            <a:off x="658368" y="1353312"/>
+            <a:ext cx="1097280" cy="45720"/>
           </a:xfrm>
           <a:prstGeom prst="rect">
             <a:avLst/>
           </a:prstGeom>
           <a:solidFill>
-            <a:srgbClr val="BF8C26"/>
+            <a:srgbClr val="C9A45D"/>
           </a:solidFill>
           <a:ln>
             <a:noFill/>
@@ -3762,19 +3843,20 @@
           <a:lstStyle/>
           <a:p>
             <a:pPr algn="ctr"/>
-          </a:p>
-        </p:txBody>
-      </p:sp>
-      <p:sp>
-        <p:nvSpPr>
-          <p:cNvPr id="4" name="TextBox 3"/>
+            <a:endParaRPr/>
+          </a:p>
+        </p:txBody>
+      </p:sp>
+      <p:sp>
+        <p:nvSpPr>
+          <p:cNvPr id="5" name="TextBox 4"/>
           <p:cNvSpPr txBox="1"/>
           <p:nvPr/>
         </p:nvSpPr>
         <p:spPr>
           <a:xfrm>
-            <a:off x="777240" y="1463040"/>
-            <a:ext cx="10058400" cy="548640"/>
+            <a:off x="203196" y="2148840"/>
+            <a:ext cx="10785325" cy="1661993"/>
           </a:xfrm>
           <a:prstGeom prst="rect">
             <a:avLst/>
@@ -3787,112 +3869,124 @@
           </a:bodyPr>
           <a:lstStyle/>
           <a:p>
-            <a:r>
-              <a:rPr b="1" sz="1700">
-                <a:solidFill>
-                  <a:srgbClr val="122947"/>
-                </a:solidFill>
-              </a:rPr>
-              <a:t>“내가 제일 중요하다”  |  “I must begin with myself.”</a:t>
-            </a:r>
-          </a:p>
-        </p:txBody>
-      </p:sp>
-      <p:sp>
-        <p:nvSpPr>
-          <p:cNvPr id="5" name="TextBox 4"/>
-          <p:cNvSpPr txBox="1"/>
-          <p:nvPr/>
-        </p:nvSpPr>
-        <p:spPr>
-          <a:xfrm>
-            <a:off x="777240" y="2194560"/>
-            <a:ext cx="10515600" cy="3840480"/>
-          </a:xfrm>
-          <a:prstGeom prst="rect">
-            <a:avLst/>
-          </a:prstGeom>
-          <a:noFill/>
-        </p:spPr>
-        <p:txBody>
-          <a:bodyPr wrap="square">
-            <a:spAutoFit/>
-          </a:bodyPr>
-          <a:lstStyle/>
-          <a:p>
-            <a:r>
-              <a:rPr b="1" sz="1650">
-                <a:solidFill>
-                  <a:srgbClr val="1A1F29"/>
-                </a:solidFill>
-              </a:rPr>
-              <a:t>• 내가 복음이 되기를</a:t>
-            </a:r>
-          </a:p>
-          <a:p>
-            <a:pPr>
-              <a:spcAft>
-                <a:spcPts val="2200"/>
-              </a:spcAft>
+            <a:pPr marL="514350" indent="-514350">
+              <a:buAutoNum type="arabicPeriod"/>
+              <a:defRPr>
+                <a:solidFill>
+                  <a:srgbClr val="F6F5EF"/>
+                </a:solidFill>
+              </a:defRPr>
             </a:pPr>
             <a:r>
-              <a:rPr b="1" sz="1650">
-                <a:solidFill>
-                  <a:srgbClr val="475970"/>
-                </a:solidFill>
-              </a:rPr>
-              <a:t>   May the Gospel become real and evident in my life.</a:t>
-            </a:r>
-          </a:p>
-          <a:p>
-            <a:r>
-              <a:rPr b="1" sz="1650">
-                <a:solidFill>
-                  <a:srgbClr val="1A1F29"/>
-                </a:solidFill>
-              </a:rPr>
-              <a:t>• 무기력하게 느껴지는 그리스도가 아니라, 성경에 나타난 능력의 그리스도를 누리기를</a:t>
-            </a:r>
-          </a:p>
-          <a:p>
-            <a:pPr>
-              <a:spcAft>
-                <a:spcPts val="2200"/>
-              </a:spcAft>
+              <a:rPr lang="ko-KR" altLang="en-US" sz="3400" b="1" dirty="0">
+                <a:solidFill>
+                  <a:srgbClr val="F6F5EF"/>
+                </a:solidFill>
+                <a:latin typeface="Noto Sans CJK KR"/>
+              </a:rPr>
+              <a:t>개인 </a:t>
+            </a:r>
+            <a:r>
+              <a:rPr lang="en-AU" altLang="ko-KR" sz="3400" b="1" dirty="0">
+                <a:solidFill>
+                  <a:srgbClr val="F6F5EF"/>
+                </a:solidFill>
+                <a:latin typeface="Noto Sans CJK KR"/>
+              </a:rPr>
+              <a:t>(</a:t>
+            </a:r>
+            <a:r>
+              <a:rPr lang="ko-KR" altLang="en-US" sz="3400" b="1" dirty="0">
+                <a:solidFill>
+                  <a:srgbClr val="F6F5EF"/>
+                </a:solidFill>
+                <a:latin typeface="Noto Sans CJK KR"/>
+              </a:rPr>
+              <a:t>부부</a:t>
+            </a:r>
+            <a:r>
+              <a:rPr lang="en-AU" altLang="ko-KR" sz="3400" b="1" dirty="0">
+                <a:solidFill>
+                  <a:srgbClr val="F6F5EF"/>
+                </a:solidFill>
+                <a:latin typeface="Noto Sans CJK KR"/>
+              </a:rPr>
+              <a:t>, </a:t>
+            </a:r>
+            <a:r>
+              <a:rPr lang="ko-KR" altLang="en-US" sz="3400" b="1" dirty="0">
+                <a:solidFill>
+                  <a:srgbClr val="F6F5EF"/>
+                </a:solidFill>
+                <a:latin typeface="Noto Sans CJK KR"/>
+              </a:rPr>
+              <a:t>가족</a:t>
+            </a:r>
+            <a:r>
+              <a:rPr lang="en-AU" altLang="ko-KR" sz="3400" b="1" dirty="0">
+                <a:solidFill>
+                  <a:srgbClr val="F6F5EF"/>
+                </a:solidFill>
+                <a:latin typeface="Noto Sans CJK KR"/>
+              </a:rPr>
+              <a:t>)</a:t>
+            </a:r>
+            <a:r>
+              <a:rPr lang="ko-KR" altLang="en-US" sz="3400" b="1" dirty="0">
+                <a:solidFill>
+                  <a:srgbClr val="F6F5EF"/>
+                </a:solidFill>
+                <a:latin typeface="Noto Sans CJK KR"/>
+              </a:rPr>
+              <a:t>이 모든민족과 후대위한 기도시간</a:t>
+            </a:r>
+            <a:endParaRPr lang="en-AU" altLang="ko-KR" sz="3400" b="1" dirty="0">
+              <a:solidFill>
+                <a:srgbClr val="F6F5EF"/>
+              </a:solidFill>
+              <a:latin typeface="Noto Sans CJK KR"/>
+            </a:endParaRPr>
+          </a:p>
+          <a:p>
+            <a:pPr marL="514350" indent="-514350">
+              <a:buAutoNum type="arabicPeriod"/>
+              <a:defRPr>
+                <a:solidFill>
+                  <a:srgbClr val="CFDCE6"/>
+                </a:solidFill>
+              </a:defRPr>
             </a:pPr>
-            <a:r>
-              <a:rPr b="1" sz="1650">
-                <a:solidFill>
-                  <a:srgbClr val="475970"/>
-                </a:solidFill>
-              </a:rPr>
-              <a:t>   May I experience Christ not as powerless, but as the powerful Christ revealed in Scripture.</a:t>
-            </a:r>
-          </a:p>
-          <a:p>
-            <a:r>
-              <a:rPr b="1" sz="1650">
-                <a:solidFill>
-                  <a:srgbClr val="1A1F29"/>
-                </a:solidFill>
-              </a:rPr>
-              <a:t>• Up &amp; Down에 흔들리지 않고 다니엘처럼 항상 한결같은 믿음이 되기를</a:t>
-            </a:r>
-          </a:p>
-          <a:p>
-            <a:pPr>
-              <a:spcAft>
-                <a:spcPts val="2200"/>
-              </a:spcAft>
+            <a:endParaRPr lang="en-AU" altLang="ko-KR" sz="3400" b="1" dirty="0">
+              <a:solidFill>
+                <a:srgbClr val="CFDCE6"/>
+              </a:solidFill>
+              <a:latin typeface="Noto Sans CJK KR"/>
+            </a:endParaRPr>
+          </a:p>
+          <a:p>
+            <a:pPr marL="514350" indent="-514350">
+              <a:buAutoNum type="arabicPeriod"/>
+              <a:defRPr>
+                <a:solidFill>
+                  <a:srgbClr val="F6F5EF"/>
+                </a:solidFill>
+              </a:defRPr>
             </a:pPr>
             <a:r>
-              <a:rPr b="1" sz="1650">
-                <a:solidFill>
-                  <a:srgbClr val="475970"/>
-                </a:solidFill>
-              </a:rPr>
-              <a:t>   May my faith remain steady like Daniel’s, not controlled by spiritual ups and downs.</a:t>
-            </a:r>
+              <a:rPr lang="ko-KR" altLang="en-US" sz="3400" b="1" dirty="0">
+                <a:solidFill>
+                  <a:srgbClr val="F6F5EF"/>
+                </a:solidFill>
+                <a:latin typeface="Noto Sans CJK KR"/>
+              </a:rPr>
+              <a:t>충성된 사람과 함께 모든민족과 후대를 위한 기도모임</a:t>
+            </a:r>
+            <a:endParaRPr lang="en-AU" altLang="ko-KR" sz="3400" b="1" dirty="0">
+              <a:solidFill>
+                <a:srgbClr val="F6F5EF"/>
+              </a:solidFill>
+              <a:latin typeface="Noto Sans CJK KR"/>
+            </a:endParaRPr>
           </a:p>
         </p:txBody>
       </p:sp>
@@ -3901,6 +3995,149 @@
   <p:clrMapOvr>
     <a:masterClrMapping/>
   </p:clrMapOvr>
+  <p:timing>
+    <p:tnLst>
+      <p:par>
+        <p:cTn id="1" dur="indefinite" restart="never" nodeType="tmRoot">
+          <p:childTnLst>
+            <p:seq concurrent="1" nextAc="seek">
+              <p:cTn id="2" dur="indefinite" nodeType="mainSeq">
+                <p:childTnLst>
+                  <p:par>
+                    <p:cTn id="3" fill="hold">
+                      <p:stCondLst>
+                        <p:cond delay="indefinite"/>
+                        <p:cond evt="onBegin" delay="0">
+                          <p:tn val="2"/>
+                        </p:cond>
+                      </p:stCondLst>
+                      <p:childTnLst>
+                        <p:par>
+                          <p:cTn id="4" fill="hold">
+                            <p:stCondLst>
+                              <p:cond delay="0"/>
+                            </p:stCondLst>
+                            <p:childTnLst>
+                              <p:par>
+                                <p:cTn id="5" presetID="10" presetClass="entr" presetSubtype="0" fill="hold" grpId="0" nodeType="afterEffect">
+                                  <p:stCondLst>
+                                    <p:cond delay="100"/>
+                                  </p:stCondLst>
+                                  <p:childTnLst>
+                                    <p:set>
+                                      <p:cBhvr>
+                                        <p:cTn id="6" dur="1" fill="hold">
+                                          <p:stCondLst>
+                                            <p:cond delay="0"/>
+                                          </p:stCondLst>
+                                        </p:cTn>
+                                        <p:tgtEl>
+                                          <p:spTgt spid="3"/>
+                                        </p:tgtEl>
+                                        <p:attrNameLst>
+                                          <p:attrName>style.visibility</p:attrName>
+                                        </p:attrNameLst>
+                                      </p:cBhvr>
+                                      <p:to>
+                                        <p:strVal val="visible"/>
+                                      </p:to>
+                                    </p:set>
+                                    <p:animEffect transition="in" filter="fade">
+                                      <p:cBhvr>
+                                        <p:cTn id="7" dur="550"/>
+                                        <p:tgtEl>
+                                          <p:spTgt spid="3"/>
+                                        </p:tgtEl>
+                                      </p:cBhvr>
+                                    </p:animEffect>
+                                  </p:childTnLst>
+                                </p:cTn>
+                              </p:par>
+                            </p:childTnLst>
+                          </p:cTn>
+                        </p:par>
+                      </p:childTnLst>
+                    </p:cTn>
+                  </p:par>
+                  <p:par>
+                    <p:cTn id="8" fill="hold">
+                      <p:stCondLst>
+                        <p:cond delay="indefinite"/>
+                      </p:stCondLst>
+                      <p:childTnLst>
+                        <p:par>
+                          <p:cTn id="9" fill="hold">
+                            <p:stCondLst>
+                              <p:cond delay="0"/>
+                            </p:stCondLst>
+                            <p:childTnLst>
+                              <p:par>
+                                <p:cTn id="10" presetID="10" presetClass="entr" presetSubtype="0" fill="hold" grpId="0" nodeType="clickEffect">
+                                  <p:stCondLst>
+                                    <p:cond delay="0"/>
+                                  </p:stCondLst>
+                                  <p:childTnLst>
+                                    <p:set>
+                                      <p:cBhvr>
+                                        <p:cTn id="11" dur="1" fill="hold">
+                                          <p:stCondLst>
+                                            <p:cond delay="0"/>
+                                          </p:stCondLst>
+                                        </p:cTn>
+                                        <p:tgtEl>
+                                          <p:spTgt spid="5"/>
+                                        </p:tgtEl>
+                                        <p:attrNameLst>
+                                          <p:attrName>style.visibility</p:attrName>
+                                        </p:attrNameLst>
+                                      </p:cBhvr>
+                                      <p:to>
+                                        <p:strVal val="visible"/>
+                                      </p:to>
+                                    </p:set>
+                                    <p:animEffect transition="in" filter="fade">
+                                      <p:cBhvr>
+                                        <p:cTn id="12" dur="550"/>
+                                        <p:tgtEl>
+                                          <p:spTgt spid="5"/>
+                                        </p:tgtEl>
+                                      </p:cBhvr>
+                                    </p:animEffect>
+                                  </p:childTnLst>
+                                </p:cTn>
+                              </p:par>
+                            </p:childTnLst>
+                          </p:cTn>
+                        </p:par>
+                      </p:childTnLst>
+                    </p:cTn>
+                  </p:par>
+                </p:childTnLst>
+              </p:cTn>
+              <p:prevCondLst>
+                <p:cond evt="onPrev" delay="0">
+                  <p:tgtEl>
+                    <p:sldTgt/>
+                  </p:tgtEl>
+                </p:cond>
+              </p:prevCondLst>
+              <p:nextCondLst>
+                <p:cond evt="onNext" delay="0">
+                  <p:tgtEl>
+                    <p:sldTgt/>
+                  </p:tgtEl>
+                </p:cond>
+              </p:nextCondLst>
+            </p:seq>
+          </p:childTnLst>
+        </p:cTn>
+      </p:par>
+    </p:tnLst>
+    <p:bldLst>
+      <p:bldP spid="3" grpId="0"/>
+      <p:bldP spid="5" grpId="0"/>
+    </p:bldLst>
+  </p:timing>
 </p:sld>
 </file>
 
@@ -5750,7 +5987,7 @@
                   <a:srgbClr val="BF7314"/>
                 </a:solidFill>
               </a:rPr>
-              <a:t>• 2. 원죄 — 절대 절망의 우리의 상태를 당연하게 인정하므로 복음 말고 살 길 없는 나를 발견하도록</a:t>
+              <a:t>• 2. 원죄 — 절대절망 인간의 상태를 당연하게 인정하므로 복음 아니고는 살길 없는 나를 발견 하도록</a:t>
             </a:r>
           </a:p>
           <a:p>
@@ -6110,6 +6347,249 @@
 </file>
 
 <file path=ppt/slides/slide6.xml><?xml version="1.0" encoding="utf-8"?>
+<p:sld xmlns:a="http://schemas.openxmlformats.org/drawingml/2006/main" xmlns:p="http://schemas.openxmlformats.org/presentationml/2006/main" xmlns:r="http://schemas.openxmlformats.org/officeDocument/2006/relationships">
+  <p:cSld>
+    <p:bg>
+      <p:bgPr>
+        <a:solidFill>
+          <a:srgbClr val="F8F6F0"/>
+        </a:solidFill>
+        <a:effectLst/>
+      </p:bgPr>
+    </p:bg>
+    <p:spTree>
+      <p:nvGrpSpPr>
+        <p:cNvPr id="1" name=""/>
+        <p:cNvGrpSpPr/>
+        <p:nvPr/>
+      </p:nvGrpSpPr>
+      <p:grpSpPr/>
+      <p:sp>
+        <p:nvSpPr>
+          <p:cNvPr id="2" name="TextBox 1"/>
+          <p:cNvSpPr txBox="1"/>
+          <p:nvPr/>
+        </p:nvSpPr>
+        <p:spPr>
+          <a:xfrm>
+            <a:off x="621792" y="384048"/>
+            <a:ext cx="10332720" cy="777240"/>
+          </a:xfrm>
+          <a:prstGeom prst="rect">
+            <a:avLst/>
+          </a:prstGeom>
+          <a:noFill/>
+        </p:spPr>
+        <p:txBody>
+          <a:bodyPr wrap="none">
+            <a:spAutoFit/>
+          </a:bodyPr>
+          <a:lstStyle/>
+          <a:p>
+            <a:r>
+              <a:rPr b="1" sz="2800">
+                <a:solidFill>
+                  <a:srgbClr val="122947"/>
+                </a:solidFill>
+              </a:rPr>
+              <a:t>2. 나를 위한 기도</a:t>
+            </a:r>
+          </a:p>
+          <a:p>
+            <a:r>
+              <a:rPr b="1" sz="2000">
+                <a:solidFill>
+                  <a:srgbClr val="5A6B7C"/>
+                </a:solidFill>
+              </a:rPr>
+              <a:t>2. Prayer for Myself</a:t>
+            </a:r>
+          </a:p>
+        </p:txBody>
+      </p:sp>
+      <p:sp>
+        <p:nvSpPr>
+          <p:cNvPr id="3" name="Rectangle 2"/>
+          <p:cNvSpPr/>
+          <p:nvPr/>
+        </p:nvSpPr>
+        <p:spPr>
+          <a:xfrm>
+            <a:off x="621792" y="1280160"/>
+            <a:ext cx="1051560" cy="36576"/>
+          </a:xfrm>
+          <a:prstGeom prst="rect">
+            <a:avLst/>
+          </a:prstGeom>
+          <a:solidFill>
+            <a:srgbClr val="BF8C26"/>
+          </a:solidFill>
+          <a:ln>
+            <a:noFill/>
+          </a:ln>
+        </p:spPr>
+        <p:style>
+          <a:lnRef idx="1">
+            <a:schemeClr val="accent1"/>
+          </a:lnRef>
+          <a:fillRef idx="3">
+            <a:schemeClr val="accent1"/>
+          </a:fillRef>
+          <a:effectRef idx="2">
+            <a:schemeClr val="accent1"/>
+          </a:effectRef>
+          <a:fontRef idx="minor">
+            <a:schemeClr val="lt1"/>
+          </a:fontRef>
+        </p:style>
+        <p:txBody>
+          <a:bodyPr rtlCol="0" anchor="ctr"/>
+          <a:lstStyle/>
+          <a:p>
+            <a:pPr algn="ctr"/>
+          </a:p>
+        </p:txBody>
+      </p:sp>
+      <p:sp>
+        <p:nvSpPr>
+          <p:cNvPr id="4" name="TextBox 3"/>
+          <p:cNvSpPr txBox="1"/>
+          <p:nvPr/>
+        </p:nvSpPr>
+        <p:spPr>
+          <a:xfrm>
+            <a:off x="777240" y="1463040"/>
+            <a:ext cx="10058400" cy="548640"/>
+          </a:xfrm>
+          <a:prstGeom prst="rect">
+            <a:avLst/>
+          </a:prstGeom>
+          <a:noFill/>
+        </p:spPr>
+        <p:txBody>
+          <a:bodyPr wrap="none">
+            <a:spAutoFit/>
+          </a:bodyPr>
+          <a:lstStyle/>
+          <a:p>
+            <a:r>
+              <a:rPr b="1" sz="1700">
+                <a:solidFill>
+                  <a:srgbClr val="122947"/>
+                </a:solidFill>
+              </a:rPr>
+              <a:t>“내가 제일 중요하다”  |  “I must begin with myself.”</a:t>
+            </a:r>
+          </a:p>
+        </p:txBody>
+      </p:sp>
+      <p:sp>
+        <p:nvSpPr>
+          <p:cNvPr id="5" name="TextBox 4"/>
+          <p:cNvSpPr txBox="1"/>
+          <p:nvPr/>
+        </p:nvSpPr>
+        <p:spPr>
+          <a:xfrm>
+            <a:off x="777240" y="2194560"/>
+            <a:ext cx="10515600" cy="3840480"/>
+          </a:xfrm>
+          <a:prstGeom prst="rect">
+            <a:avLst/>
+          </a:prstGeom>
+          <a:noFill/>
+        </p:spPr>
+        <p:txBody>
+          <a:bodyPr wrap="square">
+            <a:spAutoFit/>
+          </a:bodyPr>
+          <a:lstStyle/>
+          <a:p>
+            <a:r>
+              <a:rPr b="1" sz="1650">
+                <a:solidFill>
+                  <a:srgbClr val="1A1F29"/>
+                </a:solidFill>
+              </a:rPr>
+              <a:t>• 내가 복음이 되기를</a:t>
+            </a:r>
+          </a:p>
+          <a:p>
+            <a:pPr>
+              <a:spcAft>
+                <a:spcPts val="2200"/>
+              </a:spcAft>
+            </a:pPr>
+            <a:r>
+              <a:rPr b="1" sz="1650">
+                <a:solidFill>
+                  <a:srgbClr val="475970"/>
+                </a:solidFill>
+              </a:rPr>
+              <a:t>   May the Gospel become real and evident in my life.</a:t>
+            </a:r>
+          </a:p>
+          <a:p>
+            <a:r>
+              <a:rPr b="1" sz="1650">
+                <a:solidFill>
+                  <a:srgbClr val="1A1F29"/>
+                </a:solidFill>
+              </a:rPr>
+              <a:t>• 무기력하게 느껴지는 그리스도가 아니라, 성경에 나타난 능력의 그리스도를 누리기를</a:t>
+            </a:r>
+          </a:p>
+          <a:p>
+            <a:pPr>
+              <a:spcAft>
+                <a:spcPts val="2200"/>
+              </a:spcAft>
+            </a:pPr>
+            <a:r>
+              <a:rPr b="1" sz="1650">
+                <a:solidFill>
+                  <a:srgbClr val="475970"/>
+                </a:solidFill>
+              </a:rPr>
+              <a:t>   May I experience Christ not as powerless, but as the powerful Christ revealed in Scripture.</a:t>
+            </a:r>
+          </a:p>
+          <a:p>
+            <a:r>
+              <a:rPr b="1" sz="1650">
+                <a:solidFill>
+                  <a:srgbClr val="1A1F29"/>
+                </a:solidFill>
+              </a:rPr>
+              <a:t>• Up &amp; Down에 흔들리지 않고 다니엘처럼 항상 한결같은 믿음이 되기를</a:t>
+            </a:r>
+          </a:p>
+          <a:p>
+            <a:pPr>
+              <a:spcAft>
+                <a:spcPts val="2200"/>
+              </a:spcAft>
+            </a:pPr>
+            <a:r>
+              <a:rPr b="1" sz="1650">
+                <a:solidFill>
+                  <a:srgbClr val="475970"/>
+                </a:solidFill>
+              </a:rPr>
+              <a:t>   May my faith remain steady like Daniel’s, not controlled by spiritual ups and downs.</a:t>
+            </a:r>
+          </a:p>
+        </p:txBody>
+      </p:sp>
+    </p:spTree>
+  </p:cSld>
+  <p:clrMapOvr>
+    <a:masterClrMapping/>
+  </p:clrMapOvr>
+</p:sld>
+</file>
+
+<file path=ppt/slides/slide7.xml><?xml version="1.0" encoding="utf-8"?>
 <p:sld xmlns:a="http://schemas.openxmlformats.org/drawingml/2006/main" xmlns:r="http://schemas.openxmlformats.org/officeDocument/2006/relationships" xmlns:p="http://schemas.openxmlformats.org/presentationml/2006/main">
   <p:cSld>
     <p:bg>
@@ -6965,7 +7445,7 @@
 </p:sld>
 </file>
 
-<file path=ppt/slides/slide7.xml><?xml version="1.0" encoding="utf-8"?>
+<file path=ppt/slides/slide8.xml><?xml version="1.0" encoding="utf-8"?>
 <p:sld xmlns:a="http://schemas.openxmlformats.org/drawingml/2006/main" xmlns:r="http://schemas.openxmlformats.org/officeDocument/2006/relationships" xmlns:p="http://schemas.openxmlformats.org/presentationml/2006/main">
   <p:cSld>
     <p:bg>
@@ -8122,7 +8602,7 @@
 </p:sld>
 </file>
 
-<file path=ppt/slides/slide8.xml><?xml version="1.0" encoding="utf-8"?>
+<file path=ppt/slides/slide9.xml><?xml version="1.0" encoding="utf-8"?>
 <p:sld xmlns:a="http://schemas.openxmlformats.org/drawingml/2006/main" xmlns:r="http://schemas.openxmlformats.org/officeDocument/2006/relationships" xmlns:p="http://schemas.openxmlformats.org/presentationml/2006/main">
   <p:cSld>
     <p:bg>
@@ -8394,486 +8874,6 @@
               </a:rPr>
               <a:t>George</a:t>
             </a:r>
-          </a:p>
-        </p:txBody>
-      </p:sp>
-    </p:spTree>
-  </p:cSld>
-  <p:clrMapOvr>
-    <a:masterClrMapping/>
-  </p:clrMapOvr>
-  <p:timing>
-    <p:tnLst>
-      <p:par>
-        <p:cTn id="1" dur="indefinite" restart="never" nodeType="tmRoot">
-          <p:childTnLst>
-            <p:seq concurrent="1" nextAc="seek">
-              <p:cTn id="2" dur="indefinite" nodeType="mainSeq">
-                <p:childTnLst>
-                  <p:par>
-                    <p:cTn id="3" fill="hold">
-                      <p:stCondLst>
-                        <p:cond delay="indefinite"/>
-                        <p:cond evt="onBegin" delay="0">
-                          <p:tn val="2"/>
-                        </p:cond>
-                      </p:stCondLst>
-                      <p:childTnLst>
-                        <p:par>
-                          <p:cTn id="4" fill="hold">
-                            <p:stCondLst>
-                              <p:cond delay="0"/>
-                            </p:stCondLst>
-                            <p:childTnLst>
-                              <p:par>
-                                <p:cTn id="5" presetID="10" presetClass="entr" presetSubtype="0" fill="hold" grpId="0" nodeType="afterEffect">
-                                  <p:stCondLst>
-                                    <p:cond delay="100"/>
-                                  </p:stCondLst>
-                                  <p:childTnLst>
-                                    <p:set>
-                                      <p:cBhvr>
-                                        <p:cTn id="6" dur="1" fill="hold">
-                                          <p:stCondLst>
-                                            <p:cond delay="0"/>
-                                          </p:stCondLst>
-                                        </p:cTn>
-                                        <p:tgtEl>
-                                          <p:spTgt spid="3"/>
-                                        </p:tgtEl>
-                                        <p:attrNameLst>
-                                          <p:attrName>style.visibility</p:attrName>
-                                        </p:attrNameLst>
-                                      </p:cBhvr>
-                                      <p:to>
-                                        <p:strVal val="visible"/>
-                                      </p:to>
-                                    </p:set>
-                                    <p:animEffect transition="in" filter="fade">
-                                      <p:cBhvr>
-                                        <p:cTn id="7" dur="550"/>
-                                        <p:tgtEl>
-                                          <p:spTgt spid="3"/>
-                                        </p:tgtEl>
-                                      </p:cBhvr>
-                                    </p:animEffect>
-                                  </p:childTnLst>
-                                </p:cTn>
-                              </p:par>
-                            </p:childTnLst>
-                          </p:cTn>
-                        </p:par>
-                      </p:childTnLst>
-                    </p:cTn>
-                  </p:par>
-                  <p:par>
-                    <p:cTn id="8" fill="hold">
-                      <p:stCondLst>
-                        <p:cond delay="indefinite"/>
-                      </p:stCondLst>
-                      <p:childTnLst>
-                        <p:par>
-                          <p:cTn id="9" fill="hold">
-                            <p:stCondLst>
-                              <p:cond delay="0"/>
-                            </p:stCondLst>
-                            <p:childTnLst>
-                              <p:par>
-                                <p:cTn id="10" presetID="10" presetClass="entr" presetSubtype="0" fill="hold" grpId="0" nodeType="clickEffect">
-                                  <p:stCondLst>
-                                    <p:cond delay="0"/>
-                                  </p:stCondLst>
-                                  <p:childTnLst>
-                                    <p:set>
-                                      <p:cBhvr>
-                                        <p:cTn id="11" dur="1" fill="hold">
-                                          <p:stCondLst>
-                                            <p:cond delay="0"/>
-                                          </p:stCondLst>
-                                        </p:cTn>
-                                        <p:tgtEl>
-                                          <p:spTgt spid="5"/>
-                                        </p:tgtEl>
-                                        <p:attrNameLst>
-                                          <p:attrName>style.visibility</p:attrName>
-                                        </p:attrNameLst>
-                                      </p:cBhvr>
-                                      <p:to>
-                                        <p:strVal val="visible"/>
-                                      </p:to>
-                                    </p:set>
-                                    <p:animEffect transition="in" filter="fade">
-                                      <p:cBhvr>
-                                        <p:cTn id="12" dur="550"/>
-                                        <p:tgtEl>
-                                          <p:spTgt spid="5"/>
-                                        </p:tgtEl>
-                                      </p:cBhvr>
-                                    </p:animEffect>
-                                  </p:childTnLst>
-                                </p:cTn>
-                              </p:par>
-                            </p:childTnLst>
-                          </p:cTn>
-                        </p:par>
-                      </p:childTnLst>
-                    </p:cTn>
-                  </p:par>
-                </p:childTnLst>
-              </p:cTn>
-              <p:prevCondLst>
-                <p:cond evt="onPrev" delay="0">
-                  <p:tgtEl>
-                    <p:sldTgt/>
-                  </p:tgtEl>
-                </p:cond>
-              </p:prevCondLst>
-              <p:nextCondLst>
-                <p:cond evt="onNext" delay="0">
-                  <p:tgtEl>
-                    <p:sldTgt/>
-                  </p:tgtEl>
-                </p:cond>
-              </p:nextCondLst>
-            </p:seq>
-          </p:childTnLst>
-        </p:cTn>
-      </p:par>
-    </p:tnLst>
-    <p:bldLst>
-      <p:bldP spid="3" grpId="0"/>
-      <p:bldP spid="5" grpId="0"/>
-    </p:bldLst>
-  </p:timing>
-</p:sld>
-</file>
-
-<file path=ppt/slides/slide9.xml><?xml version="1.0" encoding="utf-8"?>
-<p:sld xmlns:a="http://schemas.openxmlformats.org/drawingml/2006/main" xmlns:r="http://schemas.openxmlformats.org/officeDocument/2006/relationships" xmlns:p="http://schemas.openxmlformats.org/presentationml/2006/main">
-  <p:cSld>
-    <p:bg>
-      <p:bgPr>
-        <a:solidFill>
-          <a:srgbClr val="1C2A38"/>
-        </a:solidFill>
-        <a:effectLst/>
-      </p:bgPr>
-    </p:bg>
-    <p:spTree>
-      <p:nvGrpSpPr>
-        <p:cNvPr id="1" name=""/>
-        <p:cNvGrpSpPr/>
-        <p:nvPr/>
-      </p:nvGrpSpPr>
-      <p:grpSpPr>
-        <a:xfrm>
-          <a:off x="0" y="0"/>
-          <a:ext cx="0" cy="0"/>
-          <a:chOff x="0" y="0"/>
-          <a:chExt cx="0" cy="0"/>
-        </a:xfrm>
-      </p:grpSpPr>
-      <p:sp>
-        <p:nvSpPr>
-          <p:cNvPr id="2" name="Rectangle 1"/>
-          <p:cNvSpPr/>
-          <p:nvPr/>
-        </p:nvSpPr>
-        <p:spPr>
-          <a:xfrm>
-            <a:off x="0" y="0"/>
-            <a:ext cx="12192000" cy="6858000"/>
-          </a:xfrm>
-          <a:prstGeom prst="rect">
-            <a:avLst/>
-          </a:prstGeom>
-          <a:gradFill rotWithShape="1">
-            <a:gsLst>
-              <a:gs pos="0">
-                <a:srgbClr val="081725"/>
-              </a:gs>
-              <a:gs pos="60000">
-                <a:srgbClr val="10273C"/>
-              </a:gs>
-              <a:gs pos="90000">
-                <a:srgbClr val="174450"/>
-              </a:gs>
-              <a:gs pos="100000">
-                <a:srgbClr val="66583F"/>
-              </a:gs>
-            </a:gsLst>
-            <a:lin ang="2700000" scaled="1"/>
-          </a:gradFill>
-          <a:ln>
-            <a:noFill/>
-          </a:ln>
-        </p:spPr>
-        <p:style>
-          <a:lnRef idx="1">
-            <a:schemeClr val="accent1"/>
-          </a:lnRef>
-          <a:fillRef idx="3">
-            <a:schemeClr val="accent1"/>
-          </a:fillRef>
-          <a:effectRef idx="2">
-            <a:schemeClr val="accent1"/>
-          </a:effectRef>
-          <a:fontRef idx="minor">
-            <a:schemeClr val="lt1"/>
-          </a:fontRef>
-        </p:style>
-        <p:txBody>
-          <a:bodyPr rtlCol="0" anchor="ctr"/>
-          <a:lstStyle/>
-          <a:p>
-            <a:pPr algn="ctr"/>
-            <a:endParaRPr/>
-          </a:p>
-        </p:txBody>
-      </p:sp>
-      <p:sp>
-        <p:nvSpPr>
-          <p:cNvPr id="3" name="TextBox 2"/>
-          <p:cNvSpPr txBox="1"/>
-          <p:nvPr/>
-        </p:nvSpPr>
-        <p:spPr>
-          <a:xfrm>
-            <a:off x="658368" y="411480"/>
-            <a:ext cx="10881360" cy="822960"/>
-          </a:xfrm>
-          <a:prstGeom prst="rect">
-            <a:avLst/>
-          </a:prstGeom>
-          <a:noFill/>
-        </p:spPr>
-        <p:txBody>
-          <a:bodyPr wrap="none">
-            <a:spAutoFit/>
-          </a:bodyPr>
-          <a:lstStyle/>
-          <a:p>
-            <a:pPr>
-              <a:defRPr>
-                <a:solidFill>
-                  <a:srgbClr val="F6F5EF"/>
-                </a:solidFill>
-              </a:defRPr>
-            </a:pPr>
-            <a:r>
-              <a:rPr sz="2800" b="1">
-                <a:solidFill>
-                  <a:srgbClr val="F6F5EF"/>
-                </a:solidFill>
-                <a:latin typeface="Noto Sans CJK KR"/>
-              </a:rPr>
-              <a:t>광고</a:t>
-            </a:r>
-          </a:p>
-          <a:p>
-            <a:pPr>
-              <a:defRPr>
-                <a:solidFill>
-                  <a:srgbClr val="E6C581"/>
-                </a:solidFill>
-              </a:defRPr>
-            </a:pPr>
-            <a:r>
-              <a:rPr sz="2800">
-                <a:solidFill>
-                  <a:srgbClr val="E6C581"/>
-                </a:solidFill>
-                <a:latin typeface="Noto Sans CJK KR"/>
-              </a:rPr>
-              <a:t>Announcements</a:t>
-            </a:r>
-          </a:p>
-        </p:txBody>
-      </p:sp>
-      <p:sp>
-        <p:nvSpPr>
-          <p:cNvPr id="4" name="Rectangle 3"/>
-          <p:cNvSpPr/>
-          <p:nvPr/>
-        </p:nvSpPr>
-        <p:spPr>
-          <a:xfrm>
-            <a:off x="658368" y="1353312"/>
-            <a:ext cx="1097280" cy="45720"/>
-          </a:xfrm>
-          <a:prstGeom prst="rect">
-            <a:avLst/>
-          </a:prstGeom>
-          <a:solidFill>
-            <a:srgbClr val="C9A45D"/>
-          </a:solidFill>
-          <a:ln>
-            <a:noFill/>
-          </a:ln>
-        </p:spPr>
-        <p:style>
-          <a:lnRef idx="1">
-            <a:schemeClr val="accent1"/>
-          </a:lnRef>
-          <a:fillRef idx="3">
-            <a:schemeClr val="accent1"/>
-          </a:fillRef>
-          <a:effectRef idx="2">
-            <a:schemeClr val="accent1"/>
-          </a:effectRef>
-          <a:fontRef idx="minor">
-            <a:schemeClr val="lt1"/>
-          </a:fontRef>
-        </p:style>
-        <p:txBody>
-          <a:bodyPr rtlCol="0" anchor="ctr"/>
-          <a:lstStyle/>
-          <a:p>
-            <a:pPr algn="ctr"/>
-            <a:endParaRPr/>
-          </a:p>
-        </p:txBody>
-      </p:sp>
-      <p:sp>
-        <p:nvSpPr>
-          <p:cNvPr id="5" name="TextBox 4"/>
-          <p:cNvSpPr txBox="1"/>
-          <p:nvPr/>
-        </p:nvSpPr>
-        <p:spPr>
-          <a:xfrm>
-            <a:off x="203196" y="2148840"/>
-            <a:ext cx="10785325" cy="1661993"/>
-          </a:xfrm>
-          <a:prstGeom prst="rect">
-            <a:avLst/>
-          </a:prstGeom>
-          <a:noFill/>
-        </p:spPr>
-        <p:txBody>
-          <a:bodyPr wrap="none">
-            <a:spAutoFit/>
-          </a:bodyPr>
-          <a:lstStyle/>
-          <a:p>
-            <a:pPr marL="514350" indent="-514350">
-              <a:buAutoNum type="arabicPeriod"/>
-              <a:defRPr>
-                <a:solidFill>
-                  <a:srgbClr val="F6F5EF"/>
-                </a:solidFill>
-              </a:defRPr>
-            </a:pPr>
-            <a:r>
-              <a:rPr lang="ko-KR" altLang="en-US" sz="3400" b="1" dirty="0">
-                <a:solidFill>
-                  <a:srgbClr val="F6F5EF"/>
-                </a:solidFill>
-                <a:latin typeface="Noto Sans CJK KR"/>
-              </a:rPr>
-              <a:t>개인 </a:t>
-            </a:r>
-            <a:r>
-              <a:rPr lang="en-AU" altLang="ko-KR" sz="3400" b="1" dirty="0">
-                <a:solidFill>
-                  <a:srgbClr val="F6F5EF"/>
-                </a:solidFill>
-                <a:latin typeface="Noto Sans CJK KR"/>
-              </a:rPr>
-              <a:t>(</a:t>
-            </a:r>
-            <a:r>
-              <a:rPr lang="ko-KR" altLang="en-US" sz="3400" b="1" dirty="0">
-                <a:solidFill>
-                  <a:srgbClr val="F6F5EF"/>
-                </a:solidFill>
-                <a:latin typeface="Noto Sans CJK KR"/>
-              </a:rPr>
-              <a:t>부부</a:t>
-            </a:r>
-            <a:r>
-              <a:rPr lang="en-AU" altLang="ko-KR" sz="3400" b="1" dirty="0">
-                <a:solidFill>
-                  <a:srgbClr val="F6F5EF"/>
-                </a:solidFill>
-                <a:latin typeface="Noto Sans CJK KR"/>
-              </a:rPr>
-              <a:t>, </a:t>
-            </a:r>
-            <a:r>
-              <a:rPr lang="ko-KR" altLang="en-US" sz="3400" b="1" dirty="0">
-                <a:solidFill>
-                  <a:srgbClr val="F6F5EF"/>
-                </a:solidFill>
-                <a:latin typeface="Noto Sans CJK KR"/>
-              </a:rPr>
-              <a:t>가족</a:t>
-            </a:r>
-            <a:r>
-              <a:rPr lang="en-AU" altLang="ko-KR" sz="3400" b="1" dirty="0">
-                <a:solidFill>
-                  <a:srgbClr val="F6F5EF"/>
-                </a:solidFill>
-                <a:latin typeface="Noto Sans CJK KR"/>
-              </a:rPr>
-              <a:t>)</a:t>
-            </a:r>
-            <a:r>
-              <a:rPr lang="ko-KR" altLang="en-US" sz="3400" b="1" dirty="0">
-                <a:solidFill>
-                  <a:srgbClr val="F6F5EF"/>
-                </a:solidFill>
-                <a:latin typeface="Noto Sans CJK KR"/>
-              </a:rPr>
-              <a:t>이 모든민족과 후대위한 기도시간</a:t>
-            </a:r>
-            <a:endParaRPr lang="en-AU" altLang="ko-KR" sz="3400" b="1" dirty="0">
-              <a:solidFill>
-                <a:srgbClr val="F6F5EF"/>
-              </a:solidFill>
-              <a:latin typeface="Noto Sans CJK KR"/>
-            </a:endParaRPr>
-          </a:p>
-          <a:p>
-            <a:pPr marL="514350" indent="-514350">
-              <a:buAutoNum type="arabicPeriod"/>
-              <a:defRPr>
-                <a:solidFill>
-                  <a:srgbClr val="CFDCE6"/>
-                </a:solidFill>
-              </a:defRPr>
-            </a:pPr>
-            <a:endParaRPr lang="en-AU" altLang="ko-KR" sz="3400" b="1" dirty="0">
-              <a:solidFill>
-                <a:srgbClr val="CFDCE6"/>
-              </a:solidFill>
-              <a:latin typeface="Noto Sans CJK KR"/>
-            </a:endParaRPr>
-          </a:p>
-          <a:p>
-            <a:pPr marL="514350" indent="-514350">
-              <a:buAutoNum type="arabicPeriod"/>
-              <a:defRPr>
-                <a:solidFill>
-                  <a:srgbClr val="F6F5EF"/>
-                </a:solidFill>
-              </a:defRPr>
-            </a:pPr>
-            <a:r>
-              <a:rPr lang="ko-KR" altLang="en-US" sz="3400" b="1" dirty="0">
-                <a:solidFill>
-                  <a:srgbClr val="F6F5EF"/>
-                </a:solidFill>
-                <a:latin typeface="Noto Sans CJK KR"/>
-              </a:rPr>
-              <a:t>충성된 사람과 함께 모든민족과 후대를 위한 기도모임</a:t>
-            </a:r>
-            <a:endParaRPr lang="en-AU" altLang="ko-KR" sz="3400" b="1" dirty="0">
-              <a:solidFill>
-                <a:srgbClr val="F6F5EF"/>
-              </a:solidFill>
-              <a:latin typeface="Noto Sans CJK KR"/>
-            </a:endParaRPr>
           </a:p>
         </p:txBody>
       </p:sp>

--- a/어라이즈 넥스트젠 2026.10 [1].pptx
+++ b/어라이즈 넥스트젠 2026.10 [1].pptx
@@ -6511,7 +6511,7 @@
                   <a:srgbClr val="1A1F29"/>
                 </a:solidFill>
               </a:rPr>
-              <a:t>• 내가 복음이 되기를</a:t>
+              <a:t>• 복음이 나의 복음이 되기를</a:t>
             </a:r>
           </a:p>
           <a:p>
@@ -6561,7 +6561,7 @@
                   <a:srgbClr val="1A1F29"/>
                 </a:solidFill>
               </a:rPr>
-              <a:t>• Up &amp; Down에 흔들리지 않고 다니엘처럼 항상 한결같은 믿음이 되기를</a:t>
+              <a:t>• Up &amp; Down에 흔들리지 않고 다니엘처럼 항상이 되기를</a:t>
             </a:r>
           </a:p>
           <a:p>
